--- a/decks/englang-p2/englang-p2_ch3_q3-language.pptx
+++ b/decks/englang-p2/englang-p2_ch3_q3-language.pptx
@@ -129,30 +129,30 @@
   <p:extLst>
     <p:ext uri="{521415D9-36F7-43E2-AB2F-B90AF26B5E84}">
       <p14:sectionLst xmlns:p14="http://schemas.microsoft.com/office/powerpoint/2010/main">
-        <p14:section name="Opening" id="{08617733-9728-14d4-de83-4e9b36f52e20}">
+        <p14:section name="Opening" id="{c0285974-fc12-ceff-abe4-c18e50be85ab}">
           <p14:sldIdLst>
             <p14:sldId id="256"/>
           </p14:sldIdLst>
         </p14:section>
-        <p14:section name="Gate" id="{29ce2632-d9cc-cc8f-23ad-169a8049dc7e}">
+        <p14:section name="Gate" id="{6b6634ef-038b-0176-4a2a-a9fd3e93f4f8}">
           <p14:sldIdLst>
             <p14:sldId id="257"/>
             <p14:sldId id="258"/>
           </p14:sldIdLst>
         </p14:section>
-        <p14:section name="Pre-teach" id="{82708162-e0d7-0af5-6a32-6735652a47c9}">
+        <p14:section name="Pre-teach" id="{0631b3df-1955-76e6-e6e6-0227c3c9a20e}">
           <p14:sldIdLst>
             <p14:sldId id="259"/>
             <p14:sldId id="260"/>
           </p14:sldIdLst>
         </p14:section>
-        <p14:section name="Read-along" id="{7ab89609-d16e-ae93-169b-9eb0ff0b0708}">
+        <p14:section name="Read-along" id="{aee47565-f720-b07b-fa70-7b3f74bc8f01}">
           <p14:sldIdLst>
             <p14:sldId id="261"/>
             <p14:sldId id="262"/>
           </p14:sldIdLst>
         </p14:section>
-        <p14:section name="Teach" id="{56a9171b-b904-e6b8-b86a-dca793f06416}">
+        <p14:section name="Teach" id="{9b2d227e-9650-c0c0-5d95-25f972713542}">
           <p14:sldIdLst>
             <p14:sldId id="263"/>
             <p14:sldId id="264"/>
@@ -164,7 +164,7 @@
             <p14:sldId id="270"/>
           </p14:sldIdLst>
         </p14:section>
-        <p14:section name="Routes" id="{df0920d1-70fb-1fd5-d673-0bd0bf5ce960}">
+        <p14:section name="Routes" id="{58eae383-43f8-ff7f-9324-4a27dee6d8c2}">
           <p14:sldIdLst>
             <p14:sldId id="271"/>
             <p14:sldId id="272"/>
@@ -172,12 +172,12 @@
             <p14:sldId id="274"/>
           </p14:sldIdLst>
         </p14:section>
-        <p14:section name="Close" id="{5a963d67-9628-eb77-6fd8-da69b0bfce1c}">
+        <p14:section name="Close" id="{781e636a-c0bf-118b-699b-f0001e5f31ac}">
           <p14:sldIdLst>
             <p14:sldId id="275"/>
           </p14:sldIdLst>
         </p14:section>
-        <p14:section name="Answers" id="{e53c18dd-7355-8231-4cb0-7e27784a793c}">
+        <p14:section name="Answers" id="{420e04d2-b0ba-0b72-e083-067a36a83a47}">
           <p14:sldIdLst>
             <p14:sldId id="276"/>
             <p14:sldId id="277"/>
@@ -1607,9 +1607,9 @@
             <a:r>
               <a:rPr lang="en-US" dirty="0"/>
               <a:t>Do now — retrieval. Silent, no notes, no help: recall comes before any support. Give about four minutes.
-1. How many marks is Question 3 worth?  →  C   12
+1. How many marks is Question 3 worth?  →  B   12
 2. A group of words built around a noun, such as ‘a wet Saturday in March’, is called a ___ phrase.  →  noun
-3. Which of these phrases from Source A is a simile?  →  A   “like something moving beneath a blanket”
+3. Which of these phrases from Source A is a simile?  →  D   “like something moving beneath a blanket”
 Circulate: who gets 3/3 (Stretch route), 2/3 (Core), 0–1 (Support)? Use this to route pupils later in the lesson.</a:t>
             </a:r>
             <a:endParaRPr lang="en-US" dirty="0"/>
@@ -1700,7 +1700,7 @@
               <a:rPr lang="en-US" dirty="0"/>
               <a:t>Exit ticket — individual, silent, on a slip or mini-whiteboard. Recall before help: no notes, no lanes, no hints. Collect before pupils leave.
 Question: How many marks is Question 3 worth?
-Answer: B   12. Question 3 is worth 12 marks and takes about 15 minutes.
+Answer: A   12. Question 3 is worth 12 marks and takes about 15 minutes.
 Source of this question: gate item 1 re-asked (options rotated) — this chapter has no third quick-check module.
 The ebook also holds task 3, "Question 3 practice answer", for homework or the next lesson's do now.
 Sort the slips: correct → ready to move on; incorrect → start next lesson in the pre-teach group, with the read-along and the Support lane. Same destination next time.</a:t>
@@ -1883,7 +1883,7 @@
             <a:r>
               <a:rPr lang="en-US" dirty="0"/>
               <a:t>Answers — task 2: The effect of two actions. Reveal the answer; pupils mark their own work in a different colour, then read the "why" together. Same destination for every lane, so one answer serves the whole class.
-Answer: A   It shows that the tiger has stopped reacting to people, as if they no longer exist for him.
+Answer: B   It shows that the tiger has stopped reacting to people, as if they no longer exist for him.
 Why: The violent verb “bangs” meets no reaction at all. The tiger has stopped treating people as real, which makes the reader uneasy about what the park has done to him.
 Ask a Support pupil to explain one step, and a Stretch pupil to share their extension.</a:t>
             </a:r>
@@ -1974,7 +1974,7 @@
             <a:r>
               <a:rPr lang="en-US" dirty="0"/>
               <a:t>Answers — exit ticket: Exit ticket. Reveal the answer; pupils mark their own work in a different colour, then read the "why" together. Same destination for every lane, so one answer serves the whole class.
-Answer: B   12
+Answer: A   12
 Why: Question 3 is worth 12 marks and takes about 15 minutes.
 Ask a Support pupil to explain one step, and a Stretch pupil to share their extension.</a:t>
             </a:r>
@@ -2065,9 +2065,9 @@
             <a:r>
               <a:rPr lang="en-US" dirty="0"/>
               <a:t>Answers — pupils mark their own in a different colour, then hands up for 3/3, 2/3, 1/3.
-1. C   12. Question 3 is worth 12 marks and takes about 15 minutes.
+1. B   12. Question 3 is worth 12 marks and takes about 15 minutes.
 2. noun. A noun phrase is built around a noun: here, ‘Saturday’.
-3. A   “like something moving beneath a blanket”. A simile compares with ‘like’ or ‘as’: the shoulders move like something under a blanket.
+3. D   “like something moving beneath a blanket”. A simile compares with ‘like’ or ‘as’: the shoulders move like something under a blanket.
 Say the route each score points to: 3/3 Stretch, 2/3 Core, 0–1 Support. Pupils may choose to move up.</a:t>
             </a:r>
             <a:endParaRPr lang="en-US" dirty="0"/>
@@ -9631,7 +9631,7 @@
                 <a:ea typeface="Calibri" pitchFamily="34" charset="-122"/>
                 <a:cs typeface="Calibri" pitchFamily="34" charset="-120"/>
               </a:rPr>
-              <a:t>It shows that the tiger has stopped reacting to people, as if they no longer exist for him.</a:t>
+              <a:t>It makes the scene light-hearted and funny.</a:t>
             </a:r>
             <a:endParaRPr lang="en-US" sz="2600" dirty="0"/>
           </a:p>
@@ -9668,7 +9668,7 @@
                 <a:ea typeface="Calibri" pitchFamily="34" charset="-122"/>
                 <a:cs typeface="Calibri" pitchFamily="34" charset="-120"/>
               </a:rPr>
-              <a:t>It shows that the tiger is about to attack the boy.</a:t>
+              <a:t>It shows that the tiger has stopped reacting to people, as if they no longer exist for him.</a:t>
             </a:r>
             <a:endParaRPr lang="en-US" sz="2600" dirty="0"/>
           </a:p>
@@ -9705,7 +9705,7 @@
                 <a:ea typeface="Calibri" pitchFamily="34" charset="-122"/>
                 <a:cs typeface="Calibri" pitchFamily="34" charset="-120"/>
               </a:rPr>
-              <a:t>It tells the reader that the glass is very thick.</a:t>
+              <a:t>It shows that the tiger is about to attack the boy.</a:t>
             </a:r>
             <a:endParaRPr lang="en-US" sz="2600" dirty="0"/>
           </a:p>
@@ -9742,7 +9742,7 @@
                 <a:ea typeface="Calibri" pitchFamily="34" charset="-122"/>
                 <a:cs typeface="Calibri" pitchFamily="34" charset="-120"/>
               </a:rPr>
-              <a:t>It makes the scene light-hearted and funny.</a:t>
+              <a:t>It tells the reader that the glass is very thick.</a:t>
             </a:r>
             <a:endParaRPr lang="en-US" sz="2600" dirty="0"/>
           </a:p>
@@ -11147,7 +11147,7 @@
                 <a:ea typeface="Calibri" pitchFamily="34" charset="-122"/>
                 <a:cs typeface="Calibri" pitchFamily="34" charset="-120"/>
               </a:rPr>
-              <a:t>4</a:t>
+              <a:t>16</a:t>
             </a:r>
             <a:endParaRPr lang="en-US" sz="2400" dirty="0"/>
           </a:p>
@@ -11184,7 +11184,7 @@
                 <a:ea typeface="Calibri" pitchFamily="34" charset="-122"/>
                 <a:cs typeface="Calibri" pitchFamily="34" charset="-120"/>
               </a:rPr>
-              <a:t>8</a:t>
+              <a:t>12</a:t>
             </a:r>
             <a:endParaRPr lang="en-US" sz="2400" dirty="0"/>
           </a:p>
@@ -11221,7 +11221,7 @@
                 <a:ea typeface="Calibri" pitchFamily="34" charset="-122"/>
                 <a:cs typeface="Calibri" pitchFamily="34" charset="-120"/>
               </a:rPr>
-              <a:t>12</a:t>
+              <a:t>4</a:t>
             </a:r>
             <a:endParaRPr lang="en-US" sz="2400" dirty="0"/>
           </a:p>
@@ -11258,7 +11258,7 @@
                 <a:ea typeface="Calibri" pitchFamily="34" charset="-122"/>
                 <a:cs typeface="Calibri" pitchFamily="34" charset="-120"/>
               </a:rPr>
-              <a:t>16</a:t>
+              <a:t>8</a:t>
             </a:r>
             <a:endParaRPr lang="en-US" sz="2400" dirty="0"/>
           </a:p>
@@ -11660,7 +11660,7 @@
                 <a:ea typeface="Calibri" pitchFamily="34" charset="-122"/>
                 <a:cs typeface="Calibri" pitchFamily="34" charset="-120"/>
               </a:rPr>
-              <a:t>“like something moving beneath a blanket”</a:t>
+              <a:t>“nine paces one way and nine paces back”</a:t>
             </a:r>
             <a:endParaRPr lang="en-US" sz="2000" dirty="0"/>
           </a:p>
@@ -11697,7 +11697,7 @@
                 <a:ea typeface="Calibri" pitchFamily="34" charset="-122"/>
                 <a:cs typeface="Calibri" pitchFamily="34" charset="-120"/>
               </a:rPr>
-              <a:t>“The tiger does not even blink.”</a:t>
+              <a:t>“Tigers: tick.”</a:t>
             </a:r>
             <a:endParaRPr lang="en-US" sz="2000" dirty="0"/>
           </a:p>
@@ -11734,7 +11734,7 @@
                 <a:ea typeface="Calibri" pitchFamily="34" charset="-122"/>
                 <a:cs typeface="Calibri" pitchFamily="34" charset="-120"/>
               </a:rPr>
-              <a:t>“Tigers: tick.”</a:t>
+              <a:t>“The tiger does not even blink.”</a:t>
             </a:r>
             <a:endParaRPr lang="en-US" sz="2000" dirty="0"/>
           </a:p>
@@ -11771,7 +11771,7 @@
                 <a:ea typeface="Calibri" pitchFamily="34" charset="-122"/>
                 <a:cs typeface="Calibri" pitchFamily="34" charset="-120"/>
               </a:rPr>
-              <a:t>“nine paces one way and nine paces back”</a:t>
+              <a:t>“like something moving beneath a blanket”</a:t>
             </a:r>
             <a:endParaRPr lang="en-US" sz="2000" dirty="0"/>
           </a:p>
@@ -12147,7 +12147,7 @@
                 <a:ea typeface="Calibri" pitchFamily="34" charset="-122"/>
                 <a:cs typeface="Calibri" pitchFamily="34" charset="-120"/>
               </a:rPr>
-              <a:t>8</a:t>
+              <a:t>12</a:t>
             </a:r>
             <a:endParaRPr lang="en-US" sz="2400" dirty="0"/>
           </a:p>
@@ -12184,7 +12184,7 @@
                 <a:ea typeface="Calibri" pitchFamily="34" charset="-122"/>
                 <a:cs typeface="Calibri" pitchFamily="34" charset="-120"/>
               </a:rPr>
-              <a:t>12</a:t>
+              <a:t>4</a:t>
             </a:r>
             <a:endParaRPr lang="en-US" sz="2400" dirty="0"/>
           </a:p>
@@ -12221,7 +12221,7 @@
                 <a:ea typeface="Calibri" pitchFamily="34" charset="-122"/>
                 <a:cs typeface="Calibri" pitchFamily="34" charset="-120"/>
               </a:rPr>
-              <a:t>16</a:t>
+              <a:t>8</a:t>
             </a:r>
             <a:endParaRPr lang="en-US" sz="2400" dirty="0"/>
           </a:p>
@@ -12258,7 +12258,7 @@
                 <a:ea typeface="Calibri" pitchFamily="34" charset="-122"/>
                 <a:cs typeface="Calibri" pitchFamily="34" charset="-120"/>
               </a:rPr>
-              <a:t>4</a:t>
+              <a:t>16</a:t>
             </a:r>
             <a:endParaRPr lang="en-US" sz="2400" dirty="0"/>
           </a:p>
@@ -13233,7 +13233,7 @@
                 <a:ea typeface="Cambria" pitchFamily="34" charset="-122"/>
                 <a:cs typeface="Cambria" pitchFamily="34" charset="-120"/>
               </a:rPr>
-              <a:t>A   It shows that the tiger has stopped reacting to people, as if they no longer exist for him.</a:t>
+              <a:t>B   It shows that the tiger has stopped reacting to people, as if they no longer exist for him.</a:t>
             </a:r>
             <a:endParaRPr lang="en-US" sz="1800" dirty="0"/>
           </a:p>
@@ -13692,7 +13692,7 @@
                 <a:ea typeface="Cambria" pitchFamily="34" charset="-122"/>
                 <a:cs typeface="Cambria" pitchFamily="34" charset="-120"/>
               </a:rPr>
-              <a:t>B   12</a:t>
+              <a:t>A   12</a:t>
             </a:r>
             <a:endParaRPr lang="en-US" sz="1800" dirty="0"/>
           </a:p>
@@ -14213,7 +14213,7 @@
                 <a:ea typeface="Calibri" pitchFamily="34" charset="-122"/>
                 <a:cs typeface="Calibri" pitchFamily="34" charset="-120"/>
               </a:rPr>
-              <a:t>C   12</a:t>
+              <a:t>B   12</a:t>
             </a:r>
             <a:endParaRPr lang="en-US" sz="2200" dirty="0"/>
           </a:p>
@@ -14713,7 +14713,7 @@
                 <a:ea typeface="Calibri" pitchFamily="34" charset="-122"/>
                 <a:cs typeface="Calibri" pitchFamily="34" charset="-120"/>
               </a:rPr>
-              <a:t>A   “like something moving beneath a blanket”</a:t>
+              <a:t>D   “like something moving beneath a blanket”</a:t>
             </a:r>
             <a:endParaRPr lang="en-US" sz="2200" dirty="0"/>
           </a:p>

--- a/decks/englang-p2/englang-p2_ch3_q3-language.pptx
+++ b/decks/englang-p2/englang-p2_ch3_q3-language.pptx
@@ -129,30 +129,30 @@
   <p:extLst>
     <p:ext uri="{521415D9-36F7-43E2-AB2F-B90AF26B5E84}">
       <p14:sectionLst xmlns:p14="http://schemas.microsoft.com/office/powerpoint/2010/main">
-        <p14:section name="Opening" id="{c0285974-fc12-ceff-abe4-c18e50be85ab}">
+        <p14:section name="Opening" id="{c64e1b8d-650c-227f-6874-d1782f5d9fd9}">
           <p14:sldIdLst>
             <p14:sldId id="256"/>
           </p14:sldIdLst>
         </p14:section>
-        <p14:section name="Gate" id="{6b6634ef-038b-0176-4a2a-a9fd3e93f4f8}">
+        <p14:section name="Gate" id="{b2ff47ac-8590-a72f-efc4-4911469314f9}">
           <p14:sldIdLst>
             <p14:sldId id="257"/>
             <p14:sldId id="258"/>
           </p14:sldIdLst>
         </p14:section>
-        <p14:section name="Pre-teach" id="{0631b3df-1955-76e6-e6e6-0227c3c9a20e}">
+        <p14:section name="Pre-teach" id="{f1a8b365-3805-9b03-8295-c6e4736641f7}">
           <p14:sldIdLst>
             <p14:sldId id="259"/>
             <p14:sldId id="260"/>
           </p14:sldIdLst>
         </p14:section>
-        <p14:section name="Read-along" id="{aee47565-f720-b07b-fa70-7b3f74bc8f01}">
+        <p14:section name="Read-along" id="{9fa608d4-1f2e-6e31-043f-1242ada24af4}">
           <p14:sldIdLst>
             <p14:sldId id="261"/>
             <p14:sldId id="262"/>
           </p14:sldIdLst>
         </p14:section>
-        <p14:section name="Teach" id="{9b2d227e-9650-c0c0-5d95-25f972713542}">
+        <p14:section name="Teach" id="{9c3a4f9b-89d5-0640-b1ec-ab1e0388e502}">
           <p14:sldIdLst>
             <p14:sldId id="263"/>
             <p14:sldId id="264"/>
@@ -164,7 +164,7 @@
             <p14:sldId id="270"/>
           </p14:sldIdLst>
         </p14:section>
-        <p14:section name="Routes" id="{58eae383-43f8-ff7f-9324-4a27dee6d8c2}">
+        <p14:section name="Routes" id="{aa97aaea-0e6f-ce9e-2737-8c72f64f94a6}">
           <p14:sldIdLst>
             <p14:sldId id="271"/>
             <p14:sldId id="272"/>
@@ -172,12 +172,12 @@
             <p14:sldId id="274"/>
           </p14:sldIdLst>
         </p14:section>
-        <p14:section name="Close" id="{781e636a-c0bf-118b-699b-f0001e5f31ac}">
+        <p14:section name="Close" id="{a9891c03-58eb-75b0-d6dc-5acd711b93fe}">
           <p14:sldIdLst>
             <p14:sldId id="275"/>
           </p14:sldIdLst>
         </p14:section>
-        <p14:section name="Answers" id="{420e04d2-b0ba-0b72-e083-067a36a83a47}">
+        <p14:section name="Answers" id="{d8b33746-94e8-c9f0-d5a0-51fd7e27456f}">
           <p14:sldIdLst>
             <p14:sldId id="276"/>
             <p14:sldId id="277"/>
